--- a/submission/CrossSignal-One-Page-Writeup.pptx
+++ b/submission/CrossSignal-One-Page-Writeup.pptx
@@ -3141,15 +3141,39 @@
           </a:p>
         </p:txBody>
       </p:sp>
-      <p:sp>
-        <p:nvSpPr>
-          <p:cNvPr id="3" name="TextBox 2"/>
+      <p:pic>
+        <p:nvPicPr>
+          <p:cNvPr id="3" name="Picture 2" descr="crosssignal-logo-mark.png"/>
+          <p:cNvPicPr>
+            <a:picLocks noChangeAspect="1"/>
+          </p:cNvPicPr>
+          <p:nvPr/>
+        </p:nvPicPr>
+        <p:blipFill>
+          <a:blip r:embed="rId2"/>
+          <a:stretch>
+            <a:fillRect/>
+          </a:stretch>
+        </p:blipFill>
+        <p:spPr>
+          <a:xfrm>
+            <a:off x="329184" y="164592"/>
+            <a:ext cx="658368" cy="658368"/>
+          </a:xfrm>
+          <a:prstGeom prst="rect">
+            <a:avLst/>
+          </a:prstGeom>
+        </p:spPr>
+      </p:pic>
+      <p:sp>
+        <p:nvSpPr>
+          <p:cNvPr id="4" name="TextBox 3"/>
           <p:cNvSpPr txBox="1"/>
           <p:nvPr/>
         </p:nvSpPr>
         <p:spPr>
           <a:xfrm>
-            <a:off x="411480" y="256032"/>
+            <a:off x="987552" y="256032"/>
             <a:ext cx="2926080" cy="347472"/>
           </a:xfrm>
           <a:prstGeom prst="rect">
@@ -3182,13 +3206,13 @@
       </p:sp>
       <p:sp>
         <p:nvSpPr>
-          <p:cNvPr id="4" name="TextBox 3"/>
+          <p:cNvPr id="5" name="TextBox 4"/>
           <p:cNvSpPr txBox="1"/>
           <p:nvPr/>
         </p:nvSpPr>
         <p:spPr>
           <a:xfrm>
-            <a:off x="429768" y="658368"/>
+            <a:off x="1005840" y="658368"/>
             <a:ext cx="4023360" cy="228600"/>
           </a:xfrm>
           <a:prstGeom prst="rect">
@@ -3206,7 +3230,7 @@
               <a:spcAft>
                 <a:spcPts val="0"/>
               </a:spcAft>
-              <a:defRPr sz="1100" b="0">
+              <a:defRPr sz="950" b="0">
                 <a:solidFill>
                   <a:srgbClr val="AEE2EE"/>
                 </a:solidFill>
@@ -3214,14 +3238,14 @@
               </a:defRPr>
             </a:pPr>
             <a:r>
-              <a:t>An auditable cross-market options agent</a:t>
-            </a:r>
-          </a:p>
-        </p:txBody>
-      </p:sp>
-      <p:sp>
-        <p:nvSpPr>
-          <p:cNvPr id="5" name="TextBox 4"/>
+              <a:t>AUDITABLE OPTIONS INTELLIGENCE</a:t>
+            </a:r>
+          </a:p>
+        </p:txBody>
+      </p:sp>
+      <p:sp>
+        <p:nvSpPr>
+          <p:cNvPr id="6" name="TextBox 5"/>
           <p:cNvSpPr txBox="1"/>
           <p:nvPr/>
         </p:nvSpPr>
@@ -3260,7 +3284,7 @@
       </p:sp>
       <p:sp>
         <p:nvSpPr>
-          <p:cNvPr id="6" name="TextBox 5"/>
+          <p:cNvPr id="7" name="TextBox 6"/>
           <p:cNvSpPr txBox="1"/>
           <p:nvPr/>
         </p:nvSpPr>
@@ -3299,7 +3323,7 @@
       </p:sp>
       <p:sp>
         <p:nvSpPr>
-          <p:cNvPr id="7" name="TextBox 6"/>
+          <p:cNvPr id="8" name="TextBox 7"/>
           <p:cNvSpPr txBox="1"/>
           <p:nvPr/>
         </p:nvSpPr>
@@ -3338,7 +3362,7 @@
       </p:sp>
       <p:sp>
         <p:nvSpPr>
-          <p:cNvPr id="8" name="Rectangle 7"/>
+          <p:cNvPr id="9" name="Rectangle 8"/>
           <p:cNvSpPr/>
           <p:nvPr/>
         </p:nvSpPr>
@@ -3383,7 +3407,7 @@
       </p:sp>
       <p:sp>
         <p:nvSpPr>
-          <p:cNvPr id="9" name="TextBox 8"/>
+          <p:cNvPr id="10" name="TextBox 9"/>
           <p:cNvSpPr txBox="1"/>
           <p:nvPr/>
         </p:nvSpPr>
@@ -3427,7 +3451,7 @@
       </p:sp>
       <p:sp>
         <p:nvSpPr>
-          <p:cNvPr id="10" name="TextBox 9"/>
+          <p:cNvPr id="11" name="TextBox 10"/>
           <p:cNvSpPr txBox="1"/>
           <p:nvPr/>
         </p:nvSpPr>
@@ -3466,7 +3490,7 @@
       </p:sp>
       <p:sp>
         <p:nvSpPr>
-          <p:cNvPr id="11" name="Rectangle 10"/>
+          <p:cNvPr id="12" name="Rectangle 11"/>
           <p:cNvSpPr/>
           <p:nvPr/>
         </p:nvSpPr>
@@ -3511,7 +3535,7 @@
       </p:sp>
       <p:sp>
         <p:nvSpPr>
-          <p:cNvPr id="12" name="TextBox 11"/>
+          <p:cNvPr id="13" name="TextBox 12"/>
           <p:cNvSpPr txBox="1"/>
           <p:nvPr/>
         </p:nvSpPr>
@@ -3550,7 +3574,7 @@
       </p:sp>
       <p:sp>
         <p:nvSpPr>
-          <p:cNvPr id="13" name="TextBox 12"/>
+          <p:cNvPr id="14" name="TextBox 13"/>
           <p:cNvSpPr txBox="1"/>
           <p:nvPr/>
         </p:nvSpPr>
@@ -3589,7 +3613,7 @@
       </p:sp>
       <p:sp>
         <p:nvSpPr>
-          <p:cNvPr id="14" name="Rectangle 13"/>
+          <p:cNvPr id="15" name="Rectangle 14"/>
           <p:cNvSpPr/>
           <p:nvPr/>
         </p:nvSpPr>
@@ -3634,7 +3658,7 @@
       </p:sp>
       <p:sp>
         <p:nvSpPr>
-          <p:cNvPr id="15" name="TextBox 14"/>
+          <p:cNvPr id="16" name="TextBox 15"/>
           <p:cNvSpPr txBox="1"/>
           <p:nvPr/>
         </p:nvSpPr>
@@ -3673,7 +3697,7 @@
       </p:sp>
       <p:sp>
         <p:nvSpPr>
-          <p:cNvPr id="16" name="Rectangle 15"/>
+          <p:cNvPr id="17" name="Rectangle 16"/>
           <p:cNvSpPr/>
           <p:nvPr/>
         </p:nvSpPr>
@@ -3718,7 +3742,7 @@
       </p:sp>
       <p:sp>
         <p:nvSpPr>
-          <p:cNvPr id="17" name="TextBox 16"/>
+          <p:cNvPr id="18" name="TextBox 17"/>
           <p:cNvSpPr txBox="1"/>
           <p:nvPr/>
         </p:nvSpPr>
@@ -3757,7 +3781,7 @@
       </p:sp>
       <p:sp>
         <p:nvSpPr>
-          <p:cNvPr id="18" name="Rectangle 17"/>
+          <p:cNvPr id="19" name="Rectangle 18"/>
           <p:cNvSpPr/>
           <p:nvPr/>
         </p:nvSpPr>
@@ -3802,7 +3826,7 @@
       </p:sp>
       <p:sp>
         <p:nvSpPr>
-          <p:cNvPr id="19" name="TextBox 18"/>
+          <p:cNvPr id="20" name="TextBox 19"/>
           <p:cNvSpPr txBox="1"/>
           <p:nvPr/>
         </p:nvSpPr>
@@ -3867,7 +3891,7 @@
       </p:sp>
       <p:sp>
         <p:nvSpPr>
-          <p:cNvPr id="20" name="TextBox 19"/>
+          <p:cNvPr id="21" name="TextBox 20"/>
           <p:cNvSpPr txBox="1"/>
           <p:nvPr/>
         </p:nvSpPr>
@@ -3906,7 +3930,7 @@
       </p:sp>
       <p:sp>
         <p:nvSpPr>
-          <p:cNvPr id="21" name="Rectangle 20"/>
+          <p:cNvPr id="22" name="Rectangle 21"/>
           <p:cNvSpPr/>
           <p:nvPr/>
         </p:nvSpPr>
@@ -3951,7 +3975,7 @@
       </p:sp>
       <p:sp>
         <p:nvSpPr>
-          <p:cNvPr id="22" name="TextBox 21"/>
+          <p:cNvPr id="23" name="TextBox 22"/>
           <p:cNvSpPr txBox="1"/>
           <p:nvPr/>
         </p:nvSpPr>
@@ -3990,7 +4014,7 @@
       </p:sp>
       <p:sp>
         <p:nvSpPr>
-          <p:cNvPr id="23" name="TextBox 22"/>
+          <p:cNvPr id="24" name="TextBox 23"/>
           <p:cNvSpPr txBox="1"/>
           <p:nvPr/>
         </p:nvSpPr>
@@ -4029,7 +4053,7 @@
       </p:sp>
       <p:sp>
         <p:nvSpPr>
-          <p:cNvPr id="24" name="Rectangle 23"/>
+          <p:cNvPr id="25" name="Rectangle 24"/>
           <p:cNvSpPr/>
           <p:nvPr/>
         </p:nvSpPr>
@@ -4074,7 +4098,7 @@
       </p:sp>
       <p:sp>
         <p:nvSpPr>
-          <p:cNvPr id="25" name="TextBox 24"/>
+          <p:cNvPr id="26" name="TextBox 25"/>
           <p:cNvSpPr txBox="1"/>
           <p:nvPr/>
         </p:nvSpPr>
@@ -4126,7 +4150,7 @@
       </p:sp>
       <p:sp>
         <p:nvSpPr>
-          <p:cNvPr id="26" name="TextBox 25"/>
+          <p:cNvPr id="27" name="TextBox 26"/>
           <p:cNvSpPr txBox="1"/>
           <p:nvPr/>
         </p:nvSpPr>
